--- a/slides/07_intro_numpy_slides.pptx
+++ b/slides/07_intro_numpy_slides.pptx
@@ -3551,7 +3551,8 @@
               <a:rPr>
                 <a:latin typeface="Courier"/>
               </a:rPr>
-              <a:t>print(arr1[0])    # First element
+              <a:t>#| caption: "▶ Ctrl/Cmd+Enter | ⇥ Ctrl/Cmd+] | ⇤ Ctrl/Cmd+["
+print(arr1[0])    # First element
 print(arr1[-1])   # Last element</a:t>
             </a:r>
           </a:p>
@@ -3576,7 +3577,8 @@
               <a:rPr>
                 <a:latin typeface="Courier"/>
               </a:rPr>
-              <a:t>print(arr1[3:6])  # Elements from index 3 to 6</a:t>
+              <a:t>#| caption: "▶ Ctrl/Cmd+Enter | ⇥ Ctrl/Cmd+] | ⇤ Ctrl/Cmd+["
+print(arr1[3:6])  # Elements from index 3 to 6</a:t>
             </a:r>
           </a:p>
         </p:txBody>
@@ -3680,7 +3682,8 @@
               <a:rPr>
                 <a:latin typeface="Courier"/>
               </a:rPr>
-              <a:t>list1 = [1,2,3,4]</a:t>
+              <a:t>#| caption: "▶ Ctrl/Cmd+Enter | ⇥ Ctrl/Cmd+] | ⇤ Ctrl/Cmd+["
+list1 = [1,2,3,4]</a:t>
             </a:r>
           </a:p>
           <a:p>
@@ -3700,7 +3703,8 @@
               <a:rPr>
                 <a:latin typeface="Courier"/>
               </a:rPr>
-              <a:t>list2 = []
+              <a:t>#| caption: "▶ Ctrl/Cmd+Enter | ⇥ Ctrl/Cmd+] | ⇤ Ctrl/Cmd+["
+list2 = []
 for item in list1:
     list2.append(2*item)
 print(list2)</a:t>
@@ -3727,7 +3731,8 @@
               <a:rPr>
                 <a:latin typeface="Courier"/>
               </a:rPr>
-              <a:t>list2 = [item*2 for item in list1]</a:t>
+              <a:t>#| caption: "▶ Ctrl/Cmd+Enter | ⇥ Ctrl/Cmd+] | ⇤ Ctrl/Cmd+["
+list2 = [item*2 for item in list1]</a:t>
             </a:r>
           </a:p>
           <a:p>
@@ -3849,7 +3854,8 @@
               <a:rPr>
                 <a:latin typeface="Courier"/>
               </a:rPr>
-              <a:t>arr1 = np.array(list1)
+              <a:t>#| caption: "▶ Ctrl/Cmd+Enter | ⇥ Ctrl/Cmd+] | ⇤ Ctrl/Cmd+["
+arr1 = np.array(list1)
 arr2 = 2*arr1
 print(arr2)</a:t>
             </a:r>
@@ -3982,7 +3988,8 @@
               <a:rPr>
                 <a:latin typeface="Courier"/>
               </a:rPr>
-              <a:t># Create a large list and array
+              <a:t>#| caption: "▶ Ctrl/Cmd+Enter | ⇥ Ctrl/Cmd+] | ⇤ Ctrl/Cmd+["
+# Create a large list and array
 large_list = list(range(1_000_000))
 large_array = np.array(large_list)</a:t>
             </a:r>
@@ -4004,7 +4011,8 @@
               <a:rPr>
                 <a:latin typeface="Courier"/>
               </a:rPr>
-              <a:t>import time
+              <a:t>#| caption: "▶ Ctrl/Cmd+Enter | ⇥ Ctrl/Cmd+] | ⇤ Ctrl/Cmd+["
+import time
 #  Track the time taken for the list multiplication
 start = time.time()
 list_result = [x * 2 for x in large_list]
@@ -4155,7 +4163,8 @@
               <a:rPr>
                 <a:latin typeface="Courier"/>
               </a:rPr>
-              <a:t># Element-wise functions
+              <a:t>#| caption: "▶ Ctrl/Cmd+Enter | ⇥ Ctrl/Cmd+] | ⇤ Ctrl/Cmd+["
+# Element-wise functions
 print(f"Square root: {np.sqrt(arr1)}")
 print(f"Mean: {np.mean(arr1)}")
 print(f"Cosine: {np.cos(arr1)}")</a:t>
@@ -4191,7 +4200,8 @@
               <a:rPr>
                 <a:latin typeface="Courier"/>
               </a:rPr>
-              <a:t>arr2 = arr1*3/2 + 5
+              <a:t>#| caption: "▶ Ctrl/Cmd+Enter | ⇥ Ctrl/Cmd+] | ⇤ Ctrl/Cmd+["
+arr2 = arr1*3/2 + 5
 print(f"Original: {arr1}")
 print(f"Modified: {arr2}")</a:t>
             </a:r>
@@ -4316,7 +4326,8 @@
                   <a:rPr>
                     <a:latin typeface="Courier"/>
                   </a:rPr>
-                  <a:t>x = np.array([1,2,3,4,5,6,7,8])</a:t>
+                  <a:t>#| caption: "▶ Ctrl/Cmd+Enter | ⇥ Ctrl/Cmd+] | ⇤ Ctrl/Cmd+["
+x = np.array([1,2,3,4,5,6,7,8])</a:t>
                 </a:r>
               </a:p>
               <a:p>
@@ -4409,7 +4420,8 @@
                   <a:rPr>
                     <a:latin typeface="Courier"/>
                   </a:rPr>
-                  <a:t>S = np.sum(x)
+                  <a:t>#| caption: "▶ Ctrl/Cmd+Enter | ⇥ Ctrl/Cmd+] | ⇤ Ctrl/Cmd+["
+S = np.sum(x)
 print(S)</a:t>
                 </a:r>
               </a:p>
@@ -4600,7 +4612,8 @@
                   <a:rPr>
                     <a:latin typeface="Courier"/>
                   </a:rPr>
-                  <a:t> y = np.cumsum(x)
+                  <a:t>#| caption: "▶ Ctrl/Cmd+Enter | ⇥ Ctrl/Cmd+] | ⇤ Ctrl/Cmd+["
+ y = np.cumsum(x)
  print(y)</a:t>
                 </a:r>
               </a:p>
@@ -4881,7 +4894,8 @@
                   <a:rPr>
                     <a:latin typeface="Courier"/>
                   </a:rPr>
-                  <a:t>a = np.array([2, 1, 4])      # Number of atoms for each element
+                  <a:t>#| caption: "▶ Ctrl/Cmd+Enter | ⇥ Ctrl/Cmd+] | ⇤ Ctrl/Cmd+["
+a = np.array([2, 1, 4])      # Number of atoms for each element
 m = np.array([12.01, 1.01, 16.00])  # Atomic masses (e.g., C, H, O)
 M = np.sum(a * m)
 print(f"Molecular mass: {M}")</a:t>
@@ -5007,7 +5021,8 @@
               <a:rPr>
                 <a:latin typeface="Courier"/>
               </a:rPr>
-              <a:t>added = arr1 + arr2
+              <a:t>#| caption: "▶ Ctrl/Cmd+Enter | ⇥ Ctrl/Cmd+] | ⇤ Ctrl/Cmd+["
+added = arr1 + arr2
 multiplied = arr1 * arr2
 print(f"Added: {added}")
 print(f"Multiplied: {multiplied}")</a:t>
@@ -5043,7 +5058,8 @@
               <a:rPr>
                 <a:latin typeface="Courier"/>
               </a:rPr>
-              <a:t>arr3 = np.array([1, 2, 3])
+              <a:t>#| caption: "▶ Ctrl/Cmd+Enter | ⇥ Ctrl/Cmd+] | ⇤ Ctrl/Cmd+["
+arr3 = np.array([1, 2, 3])
 arr4 = np.array([4, 5])
 result = arr3 + arr4</a:t>
             </a:r>
@@ -5160,7 +5176,8 @@
               <a:rPr>
                 <a:latin typeface="Courier"/>
               </a:rPr>
-              <a:t>combined = np.concatenate([arr1, arr2])
+              <a:t>#| caption: "▶ Ctrl/Cmd+Enter | ⇥ Ctrl/Cmd+] | ⇤ Ctrl/Cmd+["
+combined = np.concatenate([arr1, arr2])
 print(f"Unique elements: {combined}")</a:t>
             </a:r>
           </a:p>
@@ -6188,7 +6205,8 @@
               <a:rPr>
                 <a:latin typeface="Courier"/>
               </a:rPr>
-              <a:t>list_ex = [1, 2, 3, 4]
+              <a:t>#| caption: "▶ Ctrl/Cmd+Enter | ⇥ Ctrl/Cmd+] | ⇤ Ctrl/Cmd+["
+list_ex = [1, 2, 3, 4]
 print(list_ex)</a:t>
             </a:r>
           </a:p>
@@ -6222,7 +6240,8 @@
               <a:rPr>
                 <a:latin typeface="Courier"/>
               </a:rPr>
-              <a:t>import numpy as np
+              <a:t>#| caption: "▶ Ctrl/Cmd+Enter | ⇥ Ctrl/Cmd+] | ⇤ Ctrl/Cmd+["
+import numpy as np
 #notice that we explicitly call the np.array()
 arr_ex = np.array([1, 2, 3, 4]) 
 print(arr_ex)</a:t>
@@ -6373,7 +6392,8 @@
               <a:rPr>
                 <a:latin typeface="Courier"/>
               </a:rPr>
-              <a:t>import numpy as np
+              <a:t>#| caption: "▶ Ctrl/Cmd+Enter | ⇥ Ctrl/Cmd+] | ⇤ Ctrl/Cmd+["
+import numpy as np
 # Create array from list
 list1 = [1.,1.,2.,3.,5.,8.]
 arr1 = np.array(list1)
@@ -6414,7 +6434,8 @@
               <a:rPr>
                 <a:latin typeface="Courier"/>
               </a:rPr>
-              <a:t>print(arr1.dtype)</a:t>
+              <a:t>#| caption: "▶ Ctrl/Cmd+Enter | ⇥ Ctrl/Cmd+] | ⇤ Ctrl/Cmd+["
+print(arr1.dtype)</a:t>
             </a:r>
           </a:p>
           <a:p>
@@ -6547,7 +6568,8 @@
               <a:rPr>
                 <a:latin typeface="Courier"/>
               </a:rPr>
-              <a:t>print(f"Data type: {arr1.dtype}")
+              <a:t>#| caption: "▶ Ctrl/Cmd+Enter | ⇥ Ctrl/Cmd+] | ⇤ Ctrl/Cmd+["
+print(f"Data type: {arr1.dtype}")
 print(f"Shape: {arr1.shape}")
 print(f"Shape: {arr1.size}")</a:t>
             </a:r>
